--- a/final/presentation/IMT542_Final_Project.pptx
+++ b/final/presentation/IMT542_Final_Project.pptx
@@ -16,6 +16,7 @@
     <p:sldId id="264" r:id="rId15"/>
     <p:sldId id="265" r:id="rId16"/>
     <p:sldId id="266" r:id="rId17"/>
+    <p:sldId id="267" r:id="rId18"/>
   </p:sldIdLst>
   <p:sldSz cx="9144000" cy="6858000" type="screen4x3"/>
   <p:notesSz cx="6858000" cy="9144000"/>
@@ -3121,14 +3122,14 @@
           <a:lstStyle/>
           <a:p>
             <a:pPr>
-              <a:defRPr sz="3000" b="1">
+              <a:defRPr sz="3200" b="1">
                 <a:solidFill>
                   <a:srgbClr val="4B2E83"/>
                 </a:solidFill>
               </a:defRPr>
             </a:pPr>
             <a:r>
-              <a:t>Neighborhood Small Business Platform</a:t>
+              <a:t>LocalFind</a:t>
             </a:r>
           </a:p>
         </p:txBody>
@@ -3141,8 +3142,8 @@
         </p:nvSpPr>
         <p:spPr>
           <a:xfrm>
-            <a:off x="457200" y="1325880"/>
-            <a:ext cx="8229600" cy="4754880"/>
+            <a:off x="457200" y="1280160"/>
+            <a:ext cx="8229600" cy="4846320"/>
           </a:xfrm>
           <a:prstGeom prst="rect">
             <a:avLst/>
@@ -3157,42 +3158,42 @@
           <a:p>
             <a:pPr>
               <a:spcAft>
-                <a:spcPts val="600"/>
+                <a:spcPts val="800"/>
               </a:spcAft>
-              <a:defRPr sz="1800"/>
-            </a:pPr>
-            <a:r>
-              <a:t>IMT 542 Final Project — Portable Information Structures</a:t>
+              <a:defRPr sz="1900"/>
+            </a:pPr>
+            <a:r>
+              <a:t>Helping Seattle residents discover and support independent neighborhood businesses.</a:t>
             </a:r>
           </a:p>
           <a:p>
             <a:pPr>
               <a:spcAft>
-                <a:spcPts val="600"/>
+                <a:spcPts val="800"/>
               </a:spcAft>
-              <a:defRPr sz="1800"/>
-            </a:pPr>
-            <a:r>
-              <a:t>Sneha Reddy | Spring 2026</a:t>
-            </a:r>
+              <a:defRPr sz="1900"/>
+            </a:pPr>
           </a:p>
           <a:p>
             <a:pPr>
               <a:spcAft>
-                <a:spcPts val="600"/>
+                <a:spcPts val="800"/>
               </a:spcAft>
-              <a:defRPr sz="1800"/>
-            </a:pPr>
+              <a:defRPr sz="1900"/>
+            </a:pPr>
+            <a:r>
+              <a:t>Sneha Reddy | IMT 542 | Spring 2026</a:t>
+            </a:r>
           </a:p>
           <a:p>
             <a:pPr>
               <a:spcAft>
-                <a:spcPts val="600"/>
+                <a:spcPts val="800"/>
               </a:spcAft>
-              <a:defRPr sz="1800"/>
-            </a:pPr>
-            <a:r>
-              <a:t>GitHub: github.com/Sneha-8/IMT-542/tree/main/final</a:t>
+              <a:defRPr sz="1900"/>
+            </a:pPr>
+            <a:r>
+              <a:t>github.com/Sneha-8/IMT-542</a:t>
             </a:r>
           </a:p>
         </p:txBody>
@@ -3238,14 +3239,14 @@
           <a:lstStyle/>
           <a:p>
             <a:pPr>
-              <a:defRPr sz="3000" b="1">
+              <a:defRPr sz="3200" b="1">
                 <a:solidFill>
                   <a:srgbClr val="4B2E83"/>
                 </a:solidFill>
               </a:defRPr>
             </a:pPr>
             <a:r>
-              <a:t>Security and Ethics</a:t>
+              <a:t>Under the hood</a:t>
             </a:r>
           </a:p>
         </p:txBody>
@@ -3258,8 +3259,8 @@
         </p:nvSpPr>
         <p:spPr>
           <a:xfrm>
-            <a:off x="457200" y="1325880"/>
-            <a:ext cx="8229600" cy="4754880"/>
+            <a:off x="457200" y="1280160"/>
+            <a:ext cx="8229600" cy="4846320"/>
           </a:xfrm>
           <a:prstGeom prst="rect">
             <a:avLst/>
@@ -3274,53 +3275,31 @@
           <a:p>
             <a:pPr>
               <a:spcAft>
-                <a:spcPts val="600"/>
+                <a:spcPts val="800"/>
               </a:spcAft>
-              <a:defRPr sz="1800"/>
-            </a:pPr>
-            <a:r>
-              <a:t>Bearer token unlocks email/phone (SBP_API_TOKEN)</a:t>
+              <a:defRPr sz="1900"/>
+            </a:pPr>
+            <a:r>
+              <a:t>Flask API | MongoDB/Mongita | Python normalizer | pytest + JSON Schema</a:t>
             </a:r>
           </a:p>
           <a:p>
             <a:pPr>
               <a:spcAft>
-                <a:spcPts val="600"/>
+                <a:spcPts val="800"/>
               </a:spcAft>
-              <a:defRPr sz="1800"/>
-            </a:pPr>
-            <a:r>
-              <a:t>Public responses strip restricted contact fields</a:t>
-            </a:r>
+              <a:defRPr sz="1900"/>
+            </a:pPr>
           </a:p>
           <a:p>
             <a:pPr>
               <a:spcAft>
-                <a:spcPts val="600"/>
+                <a:spcPts val="800"/>
               </a:spcAft>
-              <a:defRPr sz="1800"/>
-            </a:pPr>
-            <a:r>
-              <a:t>No secrets in repo; ethics doc in final/docs/06_Ethics_and_Limitations.md</a:t>
-            </a:r>
-          </a:p>
-          <a:p>
-            <a:pPr>
-              <a:spcAft>
-                <a:spcPts val="600"/>
-              </a:spcAft>
-              <a:defRPr sz="1800"/>
-            </a:pPr>
-          </a:p>
-          <a:p>
-            <a:pPr>
-              <a:spcAft>
-                <a:spcPts val="600"/>
-              </a:spcAft>
-              <a:defRPr sz="1800"/>
-            </a:pPr>
-            <a:r>
-              <a:t>Aligns with G9 test plan</a:t>
+              <a:defRPr sz="1900"/>
+            </a:pPr>
+            <a:r>
+              <a:t>Demo: six Seattle businesses. Live demo via ngrok during Q&amp;A.</a:t>
             </a:r>
           </a:p>
         </p:txBody>
@@ -3366,14 +3345,14 @@
           <a:lstStyle/>
           <a:p>
             <a:pPr>
-              <a:defRPr sz="3000" b="1">
+              <a:defRPr sz="3200" b="1">
                 <a:solidFill>
                   <a:srgbClr val="4B2E83"/>
                 </a:solidFill>
               </a:defRPr>
             </a:pPr>
             <a:r>
-              <a:t>Thank You / Questions</a:t>
+              <a:t>What comes next</a:t>
             </a:r>
           </a:p>
         </p:txBody>
@@ -3386,8 +3365,8 @@
         </p:nvSpPr>
         <p:spPr>
           <a:xfrm>
-            <a:off x="457200" y="1325880"/>
-            <a:ext cx="8229600" cy="4754880"/>
+            <a:off x="457200" y="1280160"/>
+            <a:ext cx="8229600" cy="4846320"/>
           </a:xfrm>
           <a:prstGeom prst="rect">
             <a:avLst/>
@@ -3402,50 +3381,159 @@
           <a:p>
             <a:pPr>
               <a:spcAft>
-                <a:spcPts val="600"/>
+                <a:spcPts val="800"/>
               </a:spcAft>
-              <a:defRPr sz="1800"/>
-            </a:pPr>
-            <a:r>
-              <a:t>Repository: github.com/Sneha-8/IMT-542</a:t>
+              <a:defRPr sz="1900"/>
+            </a:pPr>
+            <a:r>
+              <a:t>Live Yelp ingestion with caching.</a:t>
             </a:r>
           </a:p>
           <a:p>
             <a:pPr>
               <a:spcAft>
-                <a:spcPts val="600"/>
+                <a:spcPts val="800"/>
               </a:spcAft>
-              <a:defRPr sz="1800"/>
-            </a:pPr>
-            <a:r>
-              <a:t>Documentation: final/docs/</a:t>
+              <a:defRPr sz="1900"/>
+            </a:pPr>
+            <a:r>
+              <a:t>Public deployment of LocalFind.</a:t>
             </a:r>
           </a:p>
           <a:p>
             <a:pPr>
               <a:spcAft>
-                <a:spcPts val="600"/>
+                <a:spcPts val="800"/>
               </a:spcAft>
-              <a:defRPr sz="1800"/>
-            </a:pPr>
-            <a:r>
-              <a:t>Presentation HTML: final/presentation/index.html</a:t>
+              <a:defRPr sz="1900"/>
+            </a:pPr>
+            <a:r>
+              <a:t>Partnerships with neighborhood associations.</a:t>
             </a:r>
           </a:p>
           <a:p>
             <a:pPr>
               <a:spcAft>
-                <a:spcPts val="600"/>
+                <a:spcPts val="800"/>
               </a:spcAft>
-              <a:defRPr sz="1800"/>
-            </a:pPr>
-          </a:p>
+              <a:defRPr sz="1900"/>
+            </a:pPr>
+            <a:r>
+              <a:t>Feeds for maps and civic newsletters.</a:t>
+            </a:r>
+          </a:p>
+        </p:txBody>
+      </p:sp>
+    </p:spTree>
+  </p:cSld>
+  <p:clrMapOvr>
+    <a:masterClrMapping/>
+  </p:clrMapOvr>
+</p:sld>
+</file>
+
+<file path=ppt/slides/slide12.xml><?xml version="1.0" encoding="utf-8"?>
+<p:sld xmlns:a="http://schemas.openxmlformats.org/drawingml/2006/main" xmlns:p="http://schemas.openxmlformats.org/presentationml/2006/main" xmlns:r="http://schemas.openxmlformats.org/officeDocument/2006/relationships">
+  <p:cSld>
+    <p:spTree>
+      <p:nvGrpSpPr>
+        <p:cNvPr id="1" name=""/>
+        <p:cNvGrpSpPr/>
+        <p:nvPr/>
+      </p:nvGrpSpPr>
+      <p:grpSpPr/>
+      <p:sp>
+        <p:nvSpPr>
+          <p:cNvPr id="2" name="TextBox 1"/>
+          <p:cNvSpPr txBox="1"/>
+          <p:nvPr/>
+        </p:nvSpPr>
+        <p:spPr>
+          <a:xfrm>
+            <a:off x="457200" y="320040"/>
+            <a:ext cx="8229600" cy="914400"/>
+          </a:xfrm>
+          <a:prstGeom prst="rect">
+            <a:avLst/>
+          </a:prstGeom>
+          <a:noFill/>
+        </p:spPr>
+        <p:txBody>
+          <a:bodyPr wrap="none">
+            <a:spAutoFit/>
+          </a:bodyPr>
+          <a:lstStyle/>
+          <a:p>
+            <a:pPr>
+              <a:defRPr sz="3200" b="1">
+                <a:solidFill>
+                  <a:srgbClr val="4B2E83"/>
+                </a:solidFill>
+              </a:defRPr>
+            </a:pPr>
+            <a:r>
+              <a:t>Thank you</a:t>
+            </a:r>
+          </a:p>
+        </p:txBody>
+      </p:sp>
+      <p:sp>
+        <p:nvSpPr>
+          <p:cNvPr id="3" name="TextBox 2"/>
+          <p:cNvSpPr txBox="1"/>
+          <p:nvPr/>
+        </p:nvSpPr>
+        <p:spPr>
+          <a:xfrm>
+            <a:off x="457200" y="1280160"/>
+            <a:ext cx="8229600" cy="4846320"/>
+          </a:xfrm>
+          <a:prstGeom prst="rect">
+            <a:avLst/>
+          </a:prstGeom>
+          <a:noFill/>
+        </p:spPr>
+        <p:txBody>
+          <a:bodyPr wrap="square">
+            <a:spAutoFit/>
+          </a:bodyPr>
+          <a:lstStyle/>
           <a:p>
             <a:pPr>
               <a:spcAft>
-                <a:spcPts val="600"/>
+                <a:spcPts val="800"/>
               </a:spcAft>
-              <a:defRPr sz="1800"/>
+              <a:defRPr sz="1900"/>
+            </a:pPr>
+            <a:r>
+              <a:t>LocalFind — portable neighborhood business information.</a:t>
+            </a:r>
+          </a:p>
+          <a:p>
+            <a:pPr>
+              <a:spcAft>
+                <a:spcPts val="800"/>
+              </a:spcAft>
+              <a:defRPr sz="1900"/>
+            </a:pPr>
+          </a:p>
+          <a:p>
+            <a:pPr>
+              <a:spcAft>
+                <a:spcPts val="800"/>
+              </a:spcAft>
+              <a:defRPr sz="1900"/>
+            </a:pPr>
+            <a:r>
+              <a:t>github.com/Sneha-8/IMT-542/tree/main/final</a:t>
+            </a:r>
+          </a:p>
+          <a:p>
+            <a:pPr>
+              <a:spcAft>
+                <a:spcPts val="800"/>
+              </a:spcAft>
+              <a:defRPr sz="1900"/>
             </a:pPr>
             <a:r>
               <a:t>Questions?</a:t>
@@ -3494,14 +3582,14 @@
           <a:lstStyle/>
           <a:p>
             <a:pPr>
-              <a:defRPr sz="3000" b="1">
+              <a:defRPr sz="3200" b="1">
                 <a:solidFill>
                   <a:srgbClr val="4B2E83"/>
                 </a:solidFill>
               </a:defRPr>
             </a:pPr>
             <a:r>
-              <a:t>1. Information Story</a:t>
+              <a:t>Meet Alex</a:t>
             </a:r>
           </a:p>
         </p:txBody>
@@ -3514,8 +3602,8 @@
         </p:nvSpPr>
         <p:spPr>
           <a:xfrm>
-            <a:off x="457200" y="1325880"/>
-            <a:ext cx="8229600" cy="4754880"/>
+            <a:off x="457200" y="1280160"/>
+            <a:ext cx="8229600" cy="4846320"/>
           </a:xfrm>
           <a:prstGeom prst="rect">
             <a:avLst/>
@@ -3530,69 +3618,31 @@
           <a:p>
             <a:pPr>
               <a:spcAft>
-                <a:spcPts val="600"/>
+                <a:spcPts val="800"/>
               </a:spcAft>
-              <a:defRPr sz="1800"/>
-            </a:pPr>
-            <a:r>
-              <a:t>User: Seattle resident who wants to discover and support local shops</a:t>
+              <a:defRPr sz="1900"/>
+            </a:pPr>
+            <a:r>
+              <a:t>Alex lives in Capitol Hill and wants coffee from a local shop with vegan options and Wi-Fi. They open Yelp, scroll past ads, check Instagram, and often give up.</a:t>
             </a:r>
           </a:p>
           <a:p>
             <a:pPr>
               <a:spcAft>
-                <a:spcPts val="600"/>
+                <a:spcPts val="800"/>
               </a:spcAft>
-              <a:defRPr sz="1800"/>
+              <a:defRPr sz="1900"/>
             </a:pPr>
           </a:p>
           <a:p>
             <a:pPr>
               <a:spcAft>
-                <a:spcPts val="600"/>
+                <a:spcPts val="800"/>
               </a:spcAft>
-              <a:defRPr sz="1800"/>
-            </a:pPr>
-            <a:r>
-              <a:t>Problem: Business information is scattered across Yelp, HTML directories, and social media — not portable for apps or civic tools</a:t>
-            </a:r>
-          </a:p>
-          <a:p>
-            <a:pPr>
-              <a:spcAft>
-                <a:spcPts val="600"/>
-              </a:spcAft>
-              <a:defRPr sz="1800"/>
-            </a:pPr>
-          </a:p>
-          <a:p>
-            <a:pPr>
-              <a:spcAft>
-                <a:spcPts val="600"/>
-              </a:spcAft>
-              <a:defRPr sz="1800"/>
-            </a:pPr>
-            <a:r>
-              <a:t>Outcome: One machine-readable JSON feed with provenance and quality metrics</a:t>
-            </a:r>
-          </a:p>
-          <a:p>
-            <a:pPr>
-              <a:spcAft>
-                <a:spcPts val="600"/>
-              </a:spcAft>
-              <a:defRPr sz="1800"/>
-            </a:pPr>
-          </a:p>
-          <a:p>
-            <a:pPr>
-              <a:spcAft>
-                <a:spcPts val="600"/>
-              </a:spcAft>
-              <a:defRPr sz="1800"/>
-            </a:pPr>
-            <a:r>
-              <a:t>Insight: Visualize listings + analyze relationships (stats, open-now)</a:t>
+              <a:defRPr sz="1900"/>
+            </a:pPr>
+            <a:r>
+              <a:t>The information exists — it is scattered and locked in apps that were not built for this decision.</a:t>
             </a:r>
           </a:p>
         </p:txBody>
@@ -3638,14 +3688,14 @@
           <a:lstStyle/>
           <a:p>
             <a:pPr>
-              <a:defRPr sz="3000" b="1">
+              <a:defRPr sz="3200" b="1">
                 <a:solidFill>
                   <a:srgbClr val="4B2E83"/>
                 </a:solidFill>
               </a:defRPr>
             </a:pPr>
             <a:r>
-              <a:t>Users and Requirements</a:t>
+              <a:t>Why local discovery matters</a:t>
             </a:r>
           </a:p>
         </p:txBody>
@@ -3658,8 +3708,8 @@
         </p:nvSpPr>
         <p:spPr>
           <a:xfrm>
-            <a:off x="457200" y="1325880"/>
-            <a:ext cx="8229600" cy="4754880"/>
+            <a:off x="457200" y="1280160"/>
+            <a:ext cx="8229600" cy="4846320"/>
           </a:xfrm>
           <a:prstGeom prst="rect">
             <a:avLst/>
@@ -3674,64 +3724,34 @@
           <a:p>
             <a:pPr>
               <a:spcAft>
-                <a:spcPts val="600"/>
+                <a:spcPts val="800"/>
               </a:spcAft>
-              <a:defRPr sz="1800"/>
-            </a:pPr>
-            <a:r>
-              <a:t>Residents — search by neighborhood, tags, open now</a:t>
+              <a:defRPr sz="1900"/>
+            </a:pPr>
+            <a:r>
+              <a:t>Local spending strengthens neighborhood economies.</a:t>
             </a:r>
           </a:p>
           <a:p>
             <a:pPr>
               <a:spcAft>
-                <a:spcPts val="600"/>
+                <a:spcPts val="800"/>
               </a:spcAft>
-              <a:defRPr sz="1800"/>
-            </a:pPr>
-            <a:r>
-              <a:t>Owners — stable public listing; restricted contact fields</a:t>
+              <a:defRPr sz="1900"/>
+            </a:pPr>
+            <a:r>
+              <a:t>Small shops lack chain-level SEO and ad budgets.</a:t>
             </a:r>
           </a:p>
           <a:p>
             <a:pPr>
               <a:spcAft>
-                <a:spcPts val="600"/>
+                <a:spcPts val="800"/>
               </a:spcAft>
-              <a:defRPr sz="1800"/>
-            </a:pPr>
-            <a:r>
-              <a:t>Developers — JSON Schema contract + provenance</a:t>
-            </a:r>
-          </a:p>
-          <a:p>
-            <a:pPr>
-              <a:spcAft>
-                <a:spcPts val="600"/>
-              </a:spcAft>
-              <a:defRPr sz="1800"/>
-            </a:pPr>
-          </a:p>
-          <a:p>
-            <a:pPr>
-              <a:spcAft>
-                <a:spcPts val="600"/>
-              </a:spcAft>
-              <a:defRPr sz="1800"/>
-            </a:pPr>
-            <a:r>
-              <a:t>In scope: SBP v1.0 API, FAIR metadata, NoSQL, auth-gated contact</a:t>
-            </a:r>
-          </a:p>
-          <a:p>
-            <a:pPr>
-              <a:spcAft>
-                <a:spcPts val="600"/>
-              </a:spcAft>
-              <a:defRPr sz="1800"/>
-            </a:pPr>
-            <a:r>
-              <a:t>Out of scope: payments, Yelp production key in repo, native mobile app</a:t>
+              <a:defRPr sz="1900"/>
+            </a:pPr>
+            <a:r>
+              <a:t>Civic tools and newsletters need machine-readable listings, not HTML tables.</a:t>
             </a:r>
           </a:p>
         </p:txBody>
@@ -3777,14 +3797,14 @@
           <a:lstStyle/>
           <a:p>
             <a:pPr>
-              <a:defRPr sz="3000" b="1">
+              <a:defRPr sz="3200" b="1">
                 <a:solidFill>
                   <a:srgbClr val="4B2E83"/>
                 </a:solidFill>
               </a:defRPr>
             </a:pPr>
             <a:r>
-              <a:t>2. Existing Structures and FAIR</a:t>
+              <a:t>Where information lives today</a:t>
             </a:r>
           </a:p>
         </p:txBody>
@@ -3797,8 +3817,8 @@
         </p:nvSpPr>
         <p:spPr>
           <a:xfrm>
-            <a:off x="457200" y="1325880"/>
-            <a:ext cx="8229600" cy="4754880"/>
+            <a:off x="457200" y="1280160"/>
+            <a:ext cx="8229600" cy="4846320"/>
           </a:xfrm>
           <a:prstGeom prst="rect">
             <a:avLst/>
@@ -3813,75 +3833,53 @@
           <a:p>
             <a:pPr>
               <a:spcAft>
-                <a:spcPts val="600"/>
+                <a:spcPts val="800"/>
               </a:spcAft>
-              <a:defRPr sz="1800"/>
-            </a:pPr>
-            <a:r>
-              <a:t>Sources analyzed:</a:t>
+              <a:defRPr sz="1900"/>
+            </a:pPr>
+            <a:r>
+              <a:t>Yelp and Google (proprietary, ad-driven)</a:t>
             </a:r>
           </a:p>
           <a:p>
             <a:pPr>
               <a:spcAft>
-                <a:spcPts val="600"/>
+                <a:spcPts val="800"/>
               </a:spcAft>
-              <a:defRPr sz="1800"/>
-            </a:pPr>
-            <a:r>
-              <a:t>  - Yelp Fusion API (nested vendor JSON, license limits)</a:t>
+              <a:defRPr sz="1900"/>
+            </a:pPr>
+            <a:r>
+              <a:t>Chamber HTML directories (no stable IDs)</a:t>
             </a:r>
           </a:p>
           <a:p>
             <a:pPr>
               <a:spcAft>
-                <a:spcPts val="600"/>
+                <a:spcPts val="800"/>
               </a:spcAft>
-              <a:defRPr sz="1800"/>
-            </a:pPr>
-            <a:r>
-              <a:t>  - HTML neighborhood directories (no stable IDs)</a:t>
+              <a:defRPr sz="1900"/>
+            </a:pPr>
+            <a:r>
+              <a:t>Social posts and owner sites (unstructured)</a:t>
             </a:r>
           </a:p>
           <a:p>
             <a:pPr>
               <a:spcAft>
-                <a:spcPts val="600"/>
+                <a:spcPts val="800"/>
               </a:spcAft>
-              <a:defRPr sz="1800"/>
-            </a:pPr>
-            <a:r>
-              <a:t>  - I7 static JSON (no provenance or schema version)</a:t>
-            </a:r>
+              <a:defRPr sz="1900"/>
+            </a:pPr>
           </a:p>
           <a:p>
             <a:pPr>
               <a:spcAft>
-                <a:spcPts val="600"/>
+                <a:spcPts val="800"/>
               </a:spcAft>
-              <a:defRPr sz="1800"/>
-            </a:pPr>
-          </a:p>
-          <a:p>
-            <a:pPr>
-              <a:spcAft>
-                <a:spcPts val="600"/>
-              </a:spcAft>
-              <a:defRPr sz="1800"/>
-            </a:pPr>
-            <a:r>
-              <a:t>FAIR gaps: weak reusability, inconsistent access, no completeness metrics</a:t>
-            </a:r>
-          </a:p>
-          <a:p>
-            <a:pPr>
-              <a:spcAft>
-                <a:spcPts val="600"/>
-              </a:spcAft>
-              <a:defRPr sz="1800"/>
-            </a:pPr>
-            <a:r>
-              <a:t>SBP adds: stable IDs, HTTPS REST, JSON Schema, provenance.license</a:t>
+              <a:defRPr sz="1900"/>
+            </a:pPr>
+            <a:r>
+              <a:t>Problems: cannot combine open-now + tags + neighborhood in one query; no provenance; owner contact mixed with public data.</a:t>
             </a:r>
           </a:p>
         </p:txBody>
@@ -3927,14 +3925,14 @@
           <a:lstStyle/>
           <a:p>
             <a:pPr>
-              <a:defRPr sz="3000" b="1">
+              <a:defRPr sz="3200" b="1">
                 <a:solidFill>
                   <a:srgbClr val="4B2E83"/>
                 </a:solidFill>
               </a:defRPr>
             </a:pPr>
             <a:r>
-              <a:t>3. Structure Improvements</a:t>
+              <a:t>The journey we designed</a:t>
             </a:r>
           </a:p>
         </p:txBody>
@@ -3947,8 +3945,8 @@
         </p:nvSpPr>
         <p:spPr>
           <a:xfrm>
-            <a:off x="457200" y="1325880"/>
-            <a:ext cx="8229600" cy="4754880"/>
+            <a:off x="457200" y="1280160"/>
+            <a:ext cx="8229600" cy="4846320"/>
           </a:xfrm>
           <a:prstGeom prst="rect">
             <a:avLst/>
@@ -3963,56 +3961,31 @@
           <a:p>
             <a:pPr>
               <a:spcAft>
-                <a:spcPts val="600"/>
+                <a:spcPts val="800"/>
               </a:spcAft>
-              <a:defRPr sz="1800"/>
-            </a:pPr>
-            <a:r>
-              <a:t>At least 4 dimensions changed:</a:t>
+              <a:defRPr sz="1900"/>
+            </a:pPr>
+            <a:r>
+              <a:t>Sources -&gt; normalize to one schema -&gt; document database -&gt; REST API -&gt; LocalFind UI</a:t>
             </a:r>
           </a:p>
           <a:p>
             <a:pPr>
               <a:spcAft>
-                <a:spcPts val="600"/>
+                <a:spcPts val="800"/>
               </a:spcAft>
-              <a:defRPr sz="1800"/>
-            </a:pPr>
-            <a:r>
-              <a:t>  Information — quality_flags, completeness_score</a:t>
-            </a:r>
+              <a:defRPr sz="1900"/>
+            </a:pPr>
           </a:p>
           <a:p>
             <a:pPr>
               <a:spcAft>
-                <a:spcPts val="600"/>
+                <a:spcPts val="800"/>
               </a:spcAft>
-              <a:defRPr sz="1800"/>
-            </a:pPr>
-            <a:r>
-              <a:t>  Structure — SBP envelope + flattened LocalBusiness fields</a:t>
-            </a:r>
-          </a:p>
-          <a:p>
-            <a:pPr>
-              <a:spcAft>
-                <a:spcPts val="600"/>
-              </a:spcAft>
-              <a:defRPr sz="1800"/>
-            </a:pPr>
-            <a:r>
-              <a:t>  Format — schema_version 1.0 + sbp_schema_v1.json</a:t>
-            </a:r>
-          </a:p>
-          <a:p>
-            <a:pPr>
-              <a:spcAft>
-                <a:spcPts val="600"/>
-              </a:spcAft>
-              <a:defRPr sz="1800"/>
-            </a:pPr>
-            <a:r>
-              <a:t>  Access — REST /businesses/search vs file-in-memory (I7)</a:t>
+              <a:defRPr sz="1900"/>
+            </a:pPr>
+            <a:r>
+              <a:t>Same facts can power a website, map layer, newsletter, or assistant without re-scraping.</a:t>
             </a:r>
           </a:p>
         </p:txBody>
@@ -4058,14 +4031,14 @@
           <a:lstStyle/>
           <a:p>
             <a:pPr>
-              <a:defRPr sz="3000" b="1">
+              <a:defRPr sz="3200" b="1">
                 <a:solidFill>
                   <a:srgbClr val="4B2E83"/>
                 </a:solidFill>
               </a:defRPr>
             </a:pPr>
             <a:r>
-              <a:t>New Portable Structure</a:t>
+              <a:t>The LocalFind experience</a:t>
             </a:r>
           </a:p>
         </p:txBody>
@@ -4078,8 +4051,8 @@
         </p:nvSpPr>
         <p:spPr>
           <a:xfrm>
-            <a:off x="457200" y="1325880"/>
-            <a:ext cx="8229600" cy="4754880"/>
+            <a:off x="457200" y="1280160"/>
+            <a:ext cx="8229600" cy="4846320"/>
           </a:xfrm>
           <a:prstGeom prst="rect">
             <a:avLst/>
@@ -4094,50 +4067,53 @@
           <a:p>
             <a:pPr>
               <a:spcAft>
-                <a:spcPts val="600"/>
+                <a:spcPts val="800"/>
               </a:spcAft>
-              <a:defRPr sz="1800"/>
-            </a:pPr>
-            <a:r>
-              <a:t>Top-level: schema_version, provenance, query_summary, businesses[]</a:t>
+              <a:defRPr sz="1900"/>
+            </a:pPr>
+            <a:r>
+              <a:t>Search by keyword, neighborhood, and tags.</a:t>
             </a:r>
           </a:p>
           <a:p>
             <a:pPr>
               <a:spcAft>
-                <a:spcPts val="600"/>
+                <a:spcPts val="800"/>
               </a:spcAft>
-              <a:defRPr sz="1800"/>
-            </a:pPr>
+              <a:defRPr sz="1900"/>
+            </a:pPr>
+            <a:r>
+              <a:t>See ratings, hours, open-now status, and popular items.</a:t>
+            </a:r>
           </a:p>
           <a:p>
             <a:pPr>
               <a:spcAft>
-                <a:spcPts val="600"/>
+                <a:spcPts val="800"/>
               </a:spcAft>
-              <a:defRPr sz="1800"/>
-            </a:pPr>
-            <a:r>
-              <a:t>Per business: id, name, categories, rating, location, contact, tags, hours, products, quality_flags</a:t>
+              <a:defRPr sz="1900"/>
+            </a:pPr>
+            <a:r>
+              <a:t>Business detail with website, directions, and provenance footer.</a:t>
             </a:r>
           </a:p>
           <a:p>
             <a:pPr>
               <a:spcAft>
-                <a:spcPts val="600"/>
+                <a:spcPts val="800"/>
               </a:spcAft>
-              <a:defRPr sz="1800"/>
+              <a:defRPr sz="1900"/>
             </a:pPr>
           </a:p>
           <a:p>
             <a:pPr>
               <a:spcAft>
-                <a:spcPts val="600"/>
+                <a:spcPts val="800"/>
               </a:spcAft>
-              <a:defRPr sz="1800"/>
-            </a:pPr>
-            <a:r>
-              <a:t>Normalizer: small_businesses.json -&gt; SBP record (normalizer.py)</a:t>
+              <a:defRPr sz="1900"/>
+            </a:pPr>
+            <a:r>
+              <a:t>See live prototype: final/web/platform.html (open in browser during demo)</a:t>
             </a:r>
           </a:p>
         </p:txBody>
@@ -4183,14 +4159,14 @@
           <a:lstStyle/>
           <a:p>
             <a:pPr>
-              <a:defRPr sz="3000" b="1">
+              <a:defRPr sz="3200" b="1">
                 <a:solidFill>
                   <a:srgbClr val="4B2E83"/>
                 </a:solidFill>
               </a:defRPr>
             </a:pPr>
             <a:r>
-              <a:t>4. Functional System</a:t>
+              <a:t>Portable structure — what changed</a:t>
             </a:r>
           </a:p>
         </p:txBody>
@@ -4203,8 +4179,8 @@
         </p:nvSpPr>
         <p:spPr>
           <a:xfrm>
-            <a:off x="457200" y="1325880"/>
-            <a:ext cx="8229600" cy="4754880"/>
+            <a:off x="457200" y="1280160"/>
+            <a:ext cx="8229600" cy="4846320"/>
           </a:xfrm>
           <a:prstGeom prst="rect">
             <a:avLst/>
@@ -4219,83 +4195,34 @@
           <a:p>
             <a:pPr>
               <a:spcAft>
-                <a:spcPts val="600"/>
+                <a:spcPts val="800"/>
               </a:spcAft>
-              <a:defRPr sz="1800"/>
-            </a:pPr>
-            <a:r>
-              <a:t>Stack: JSON source -&gt; seed_db.py -&gt; MongoDB/Mongita -&gt; Flask API</a:t>
+              <a:defRPr sz="1900"/>
+            </a:pPr>
+            <a:r>
+              <a:t>Envelope: schema version, provenance, completeness on every response.</a:t>
             </a:r>
           </a:p>
           <a:p>
             <a:pPr>
               <a:spcAft>
-                <a:spcPts val="600"/>
+                <a:spcPts val="800"/>
               </a:spcAft>
-              <a:defRPr sz="1800"/>
-            </a:pPr>
+              <a:defRPr sz="1900"/>
+            </a:pPr>
+            <a:r>
+              <a:t>Records: split addresses, E.164 phones, tags, hours, quality flags.</a:t>
+            </a:r>
           </a:p>
           <a:p>
             <a:pPr>
               <a:spcAft>
-                <a:spcPts val="600"/>
+                <a:spcPts val="800"/>
               </a:spcAft>
-              <a:defRPr sz="1800"/>
-            </a:pPr>
-            <a:r>
-              <a:t>Run locally:</a:t>
-            </a:r>
-          </a:p>
-          <a:p>
-            <a:pPr>
-              <a:spcAft>
-                <a:spcPts val="600"/>
-              </a:spcAft>
-              <a:defRPr sz="1800"/>
-            </a:pPr>
-            <a:r>
-              <a:t>  export USE_MONGITA=true &amp;&amp; python seed_db.py</a:t>
-            </a:r>
-          </a:p>
-          <a:p>
-            <a:pPr>
-              <a:spcAft>
-                <a:spcPts val="600"/>
-              </a:spcAft>
-              <a:defRPr sz="1800"/>
-            </a:pPr>
-            <a:r>
-              <a:t>  flask --app app run -p 5002</a:t>
-            </a:r>
-          </a:p>
-          <a:p>
-            <a:pPr>
-              <a:spcAft>
-                <a:spcPts val="600"/>
-              </a:spcAft>
-              <a:defRPr sz="1800"/>
-            </a:pPr>
-            <a:r>
-              <a:t>  ngrok http 5002  (submit HTTPS URL to Canvas)</a:t>
-            </a:r>
-          </a:p>
-          <a:p>
-            <a:pPr>
-              <a:spcAft>
-                <a:spcPts val="600"/>
-              </a:spcAft>
-              <a:defRPr sz="1800"/>
-            </a:pPr>
-          </a:p>
-          <a:p>
-            <a:pPr>
-              <a:spcAft>
-                <a:spcPts val="600"/>
-              </a:spcAft>
-              <a:defRPr sz="1800"/>
-            </a:pPr>
-            <a:r>
-              <a:t>Demo client: python access_api.py</a:t>
+              <a:defRPr sz="1900"/>
+            </a:pPr>
+            <a:r>
+              <a:t>Access: HTTPS search API instead of a static JSON file only developers can read.</a:t>
             </a:r>
           </a:p>
         </p:txBody>
@@ -4341,14 +4268,14 @@
           <a:lstStyle/>
           <a:p>
             <a:pPr>
-              <a:defRPr sz="3000" b="1">
+              <a:defRPr sz="3200" b="1">
                 <a:solidFill>
                   <a:srgbClr val="4B2E83"/>
                 </a:solidFill>
               </a:defRPr>
             </a:pPr>
             <a:r>
-              <a:t>Live Demo Endpoints</a:t>
+              <a:t>Trust and privacy</a:t>
             </a:r>
           </a:p>
         </p:txBody>
@@ -4361,8 +4288,8 @@
         </p:nvSpPr>
         <p:spPr>
           <a:xfrm>
-            <a:off x="457200" y="1325880"/>
-            <a:ext cx="8229600" cy="4754880"/>
+            <a:off x="457200" y="1280160"/>
+            <a:ext cx="8229600" cy="4846320"/>
           </a:xfrm>
           <a:prstGeom prst="rect">
             <a:avLst/>
@@ -4377,75 +4304,34 @@
           <a:p>
             <a:pPr>
               <a:spcAft>
-                <a:spcPts val="600"/>
+                <a:spcPts val="800"/>
               </a:spcAft>
-              <a:defRPr sz="1800"/>
-            </a:pPr>
-            <a:r>
-              <a:t>GET /health</a:t>
+              <a:defRPr sz="1900"/>
+            </a:pPr>
+            <a:r>
+              <a:t>Provenance and license on every payload.</a:t>
             </a:r>
           </a:p>
           <a:p>
             <a:pPr>
               <a:spcAft>
-                <a:spcPts val="600"/>
+                <a:spcPts val="800"/>
               </a:spcAft>
-              <a:defRPr sz="1800"/>
-            </a:pPr>
-            <a:r>
-              <a:t>GET /schema</a:t>
+              <a:defRPr sz="1900"/>
+            </a:pPr>
+            <a:r>
+              <a:t>Quality flags so consumers know what is missing.</a:t>
             </a:r>
           </a:p>
           <a:p>
             <a:pPr>
               <a:spcAft>
-                <a:spcPts val="600"/>
+                <a:spcPts val="800"/>
               </a:spcAft>
-              <a:defRPr sz="1800"/>
-            </a:pPr>
-            <a:r>
-              <a:t>GET /businesses/search?term=coffee&amp;location=Capitol Hill</a:t>
-            </a:r>
-          </a:p>
-          <a:p>
-            <a:pPr>
-              <a:spcAft>
-                <a:spcPts val="600"/>
-              </a:spcAft>
-              <a:defRPr sz="1800"/>
-            </a:pPr>
-            <a:r>
-              <a:t>GET /businesses/sb-001</a:t>
-            </a:r>
-          </a:p>
-          <a:p>
-            <a:pPr>
-              <a:spcAft>
-                <a:spcPts val="600"/>
-              </a:spcAft>
-              <a:defRPr sz="1800"/>
-            </a:pPr>
-            <a:r>
-              <a:t>GET /stats  |  GET /open-now</a:t>
-            </a:r>
-          </a:p>
-          <a:p>
-            <a:pPr>
-              <a:spcAft>
-                <a:spcPts val="600"/>
-              </a:spcAft>
-              <a:defRPr sz="1800"/>
-            </a:pPr>
-          </a:p>
-          <a:p>
-            <a:pPr>
-              <a:spcAft>
-                <a:spcPts val="600"/>
-              </a:spcAft>
-              <a:defRPr sz="1800"/>
-            </a:pPr>
-            <a:r>
-              <a:t>HTML slides: final/presentation/index.html?api=&lt;ngrok-url&gt;</a:t>
+              <a:defRPr sz="1900"/>
+            </a:pPr>
+            <a:r>
+              <a:t>Public listings hide owner email/phone unless Bearer token authorizes access.</a:t>
             </a:r>
           </a:p>
         </p:txBody>
@@ -4491,14 +4377,14 @@
           <a:lstStyle/>
           <a:p>
             <a:pPr>
-              <a:defRPr sz="3000" b="1">
+              <a:defRPr sz="3200" b="1">
                 <a:solidFill>
                   <a:srgbClr val="4B2E83"/>
                 </a:solidFill>
               </a:defRPr>
             </a:pPr>
             <a:r>
-              <a:t>Quality and Performance</a:t>
+              <a:t>How we got here</a:t>
             </a:r>
           </a:p>
         </p:txBody>
@@ -4511,8 +4397,8 @@
         </p:nvSpPr>
         <p:spPr>
           <a:xfrm>
-            <a:off x="457200" y="1325880"/>
-            <a:ext cx="8229600" cy="4754880"/>
+            <a:off x="457200" y="1280160"/>
+            <a:ext cx="8229600" cy="4846320"/>
           </a:xfrm>
           <a:prstGeom prst="rect">
             <a:avLst/>
@@ -4527,53 +4413,53 @@
           <a:p>
             <a:pPr>
               <a:spcAft>
-                <a:spcPts val="600"/>
+                <a:spcPts val="800"/>
               </a:spcAft>
-              <a:defRPr sz="1800"/>
-            </a:pPr>
-            <a:r>
-              <a:t>Desired: completeness &gt;= 0.85, schema validates 100%</a:t>
+              <a:defRPr sz="1900"/>
+            </a:pPr>
+            <a:r>
+              <a:t>Started with Flask + JSON file.</a:t>
             </a:r>
           </a:p>
           <a:p>
             <a:pPr>
               <a:spcAft>
-                <a:spcPts val="600"/>
+                <a:spcPts val="800"/>
               </a:spcAft>
-              <a:defRPr sz="1800"/>
-            </a:pPr>
-            <a:r>
-              <a:t>Observed: ~0.92 completeness on demo set; 9 pytest tests pass</a:t>
+              <a:defRPr sz="1900"/>
+            </a:pPr>
+            <a:r>
+              <a:t>Added MongoDB and aggregation endpoints.</a:t>
             </a:r>
           </a:p>
           <a:p>
             <a:pPr>
               <a:spcAft>
-                <a:spcPts val="600"/>
+                <a:spcPts val="800"/>
               </a:spcAft>
-              <a:defRPr sz="1800"/>
-            </a:pPr>
-            <a:r>
-              <a:t>Latency: warm search &lt; 50 ms local</a:t>
+              <a:defRPr sz="1900"/>
+            </a:pPr>
+            <a:r>
+              <a:t>Shipped schema v1.0, normalizer, tests, and this UI prototype.</a:t>
             </a:r>
           </a:p>
           <a:p>
             <a:pPr>
               <a:spcAft>
-                <a:spcPts val="600"/>
+                <a:spcPts val="800"/>
               </a:spcAft>
-              <a:defRPr sz="1800"/>
+              <a:defRPr sz="1900"/>
             </a:pPr>
           </a:p>
           <a:p>
             <a:pPr>
               <a:spcAft>
-                <a:spcPts val="600"/>
+                <a:spcPts val="800"/>
               </a:spcAft>
-              <a:defRPr sz="1800"/>
-            </a:pPr>
-            <a:r>
-              <a:t>Remediation: Yelp live adapter, UptimeRobot, Locust load tests (G9)</a:t>
+              <a:defRPr sz="1900"/>
+            </a:pPr>
+            <a:r>
+              <a:t>Production path: Yelp Fusion feeds the same normalizer.</a:t>
             </a:r>
           </a:p>
         </p:txBody>

--- a/final/presentation/IMT542_Final_Project.pptx
+++ b/final/presentation/IMT542_Final_Project.pptx
@@ -13,10 +13,6 @@
     <p:sldId id="261" r:id="rId12"/>
     <p:sldId id="262" r:id="rId13"/>
     <p:sldId id="263" r:id="rId14"/>
-    <p:sldId id="264" r:id="rId15"/>
-    <p:sldId id="265" r:id="rId16"/>
-    <p:sldId id="266" r:id="rId17"/>
-    <p:sldId id="267" r:id="rId18"/>
   </p:sldIdLst>
   <p:sldSz cx="9144000" cy="6858000" type="screen4x3"/>
   <p:notesSz cx="6858000" cy="9144000"/>
@@ -3107,8 +3103,8 @@
         </p:nvSpPr>
         <p:spPr>
           <a:xfrm>
-            <a:off x="457200" y="320040"/>
-            <a:ext cx="8229600" cy="914400"/>
+            <a:off x="411480" y="274320"/>
+            <a:ext cx="8321040" cy="868680"/>
           </a:xfrm>
           <a:prstGeom prst="rect">
             <a:avLst/>
@@ -3122,7 +3118,7 @@
           <a:lstStyle/>
           <a:p>
             <a:pPr>
-              <a:defRPr sz="3200" b="1">
+              <a:defRPr sz="2800" b="1">
                 <a:solidFill>
                   <a:srgbClr val="4B2E83"/>
                 </a:solidFill>
@@ -3142,8 +3138,8 @@
         </p:nvSpPr>
         <p:spPr>
           <a:xfrm>
-            <a:off x="457200" y="1280160"/>
-            <a:ext cx="8229600" cy="4846320"/>
+            <a:off x="411480" y="1143000"/>
+            <a:ext cx="8321040" cy="5029200"/>
           </a:xfrm>
           <a:prstGeom prst="rect">
             <a:avLst/>
@@ -3158,385 +3154,23 @@
           <a:p>
             <a:pPr>
               <a:spcAft>
-                <a:spcPts val="800"/>
+                <a:spcPts val="600"/>
               </a:spcAft>
-              <a:defRPr sz="1900"/>
-            </a:pPr>
-            <a:r>
-              <a:t>Helping Seattle residents discover and support independent neighborhood businesses.</a:t>
+              <a:defRPr sz="1700"/>
+            </a:pPr>
+            <a:r>
+              <a:t>One place to discover small businesses in your neighborhood.</a:t>
             </a:r>
           </a:p>
           <a:p>
             <a:pPr>
               <a:spcAft>
-                <a:spcPts val="800"/>
+                <a:spcPts val="600"/>
               </a:spcAft>
-              <a:defRPr sz="1900"/>
-            </a:pPr>
-          </a:p>
-          <a:p>
-            <a:pPr>
-              <a:spcAft>
-                <a:spcPts val="800"/>
-              </a:spcAft>
-              <a:defRPr sz="1900"/>
-            </a:pPr>
-            <a:r>
-              <a:t>Sneha Reddy | IMT 542 | Spring 2026</a:t>
-            </a:r>
-          </a:p>
-          <a:p>
-            <a:pPr>
-              <a:spcAft>
-                <a:spcPts val="800"/>
-              </a:spcAft>
-              <a:defRPr sz="1900"/>
-            </a:pPr>
-            <a:r>
-              <a:t>github.com/Sneha-8/IMT-542</a:t>
-            </a:r>
-          </a:p>
-        </p:txBody>
-      </p:sp>
-    </p:spTree>
-  </p:cSld>
-  <p:clrMapOvr>
-    <a:masterClrMapping/>
-  </p:clrMapOvr>
-</p:sld>
-</file>
-
-<file path=ppt/slides/slide10.xml><?xml version="1.0" encoding="utf-8"?>
-<p:sld xmlns:a="http://schemas.openxmlformats.org/drawingml/2006/main" xmlns:p="http://schemas.openxmlformats.org/presentationml/2006/main" xmlns:r="http://schemas.openxmlformats.org/officeDocument/2006/relationships">
-  <p:cSld>
-    <p:spTree>
-      <p:nvGrpSpPr>
-        <p:cNvPr id="1" name=""/>
-        <p:cNvGrpSpPr/>
-        <p:nvPr/>
-      </p:nvGrpSpPr>
-      <p:grpSpPr/>
-      <p:sp>
-        <p:nvSpPr>
-          <p:cNvPr id="2" name="TextBox 1"/>
-          <p:cNvSpPr txBox="1"/>
-          <p:nvPr/>
-        </p:nvSpPr>
-        <p:spPr>
-          <a:xfrm>
-            <a:off x="457200" y="320040"/>
-            <a:ext cx="8229600" cy="914400"/>
-          </a:xfrm>
-          <a:prstGeom prst="rect">
-            <a:avLst/>
-          </a:prstGeom>
-          <a:noFill/>
-        </p:spPr>
-        <p:txBody>
-          <a:bodyPr wrap="none">
-            <a:spAutoFit/>
-          </a:bodyPr>
-          <a:lstStyle/>
-          <a:p>
-            <a:pPr>
-              <a:defRPr sz="3200" b="1">
-                <a:solidFill>
-                  <a:srgbClr val="4B2E83"/>
-                </a:solidFill>
-              </a:defRPr>
-            </a:pPr>
-            <a:r>
-              <a:t>Under the hood</a:t>
-            </a:r>
-          </a:p>
-        </p:txBody>
-      </p:sp>
-      <p:sp>
-        <p:nvSpPr>
-          <p:cNvPr id="3" name="TextBox 2"/>
-          <p:cNvSpPr txBox="1"/>
-          <p:nvPr/>
-        </p:nvSpPr>
-        <p:spPr>
-          <a:xfrm>
-            <a:off x="457200" y="1280160"/>
-            <a:ext cx="8229600" cy="4846320"/>
-          </a:xfrm>
-          <a:prstGeom prst="rect">
-            <a:avLst/>
-          </a:prstGeom>
-          <a:noFill/>
-        </p:spPr>
-        <p:txBody>
-          <a:bodyPr wrap="square">
-            <a:spAutoFit/>
-          </a:bodyPr>
-          <a:lstStyle/>
-          <a:p>
-            <a:pPr>
-              <a:spcAft>
-                <a:spcPts val="800"/>
-              </a:spcAft>
-              <a:defRPr sz="1900"/>
-            </a:pPr>
-            <a:r>
-              <a:t>Flask API | MongoDB/Mongita | Python normalizer | pytest + JSON Schema</a:t>
-            </a:r>
-          </a:p>
-          <a:p>
-            <a:pPr>
-              <a:spcAft>
-                <a:spcPts val="800"/>
-              </a:spcAft>
-              <a:defRPr sz="1900"/>
-            </a:pPr>
-          </a:p>
-          <a:p>
-            <a:pPr>
-              <a:spcAft>
-                <a:spcPts val="800"/>
-              </a:spcAft>
-              <a:defRPr sz="1900"/>
-            </a:pPr>
-            <a:r>
-              <a:t>Demo: six Seattle businesses. Live demo via ngrok during Q&amp;A.</a:t>
-            </a:r>
-          </a:p>
-        </p:txBody>
-      </p:sp>
-    </p:spTree>
-  </p:cSld>
-  <p:clrMapOvr>
-    <a:masterClrMapping/>
-  </p:clrMapOvr>
-</p:sld>
-</file>
-
-<file path=ppt/slides/slide11.xml><?xml version="1.0" encoding="utf-8"?>
-<p:sld xmlns:a="http://schemas.openxmlformats.org/drawingml/2006/main" xmlns:p="http://schemas.openxmlformats.org/presentationml/2006/main" xmlns:r="http://schemas.openxmlformats.org/officeDocument/2006/relationships">
-  <p:cSld>
-    <p:spTree>
-      <p:nvGrpSpPr>
-        <p:cNvPr id="1" name=""/>
-        <p:cNvGrpSpPr/>
-        <p:nvPr/>
-      </p:nvGrpSpPr>
-      <p:grpSpPr/>
-      <p:sp>
-        <p:nvSpPr>
-          <p:cNvPr id="2" name="TextBox 1"/>
-          <p:cNvSpPr txBox="1"/>
-          <p:nvPr/>
-        </p:nvSpPr>
-        <p:spPr>
-          <a:xfrm>
-            <a:off x="457200" y="320040"/>
-            <a:ext cx="8229600" cy="914400"/>
-          </a:xfrm>
-          <a:prstGeom prst="rect">
-            <a:avLst/>
-          </a:prstGeom>
-          <a:noFill/>
-        </p:spPr>
-        <p:txBody>
-          <a:bodyPr wrap="none">
-            <a:spAutoFit/>
-          </a:bodyPr>
-          <a:lstStyle/>
-          <a:p>
-            <a:pPr>
-              <a:defRPr sz="3200" b="1">
-                <a:solidFill>
-                  <a:srgbClr val="4B2E83"/>
-                </a:solidFill>
-              </a:defRPr>
-            </a:pPr>
-            <a:r>
-              <a:t>What comes next</a:t>
-            </a:r>
-          </a:p>
-        </p:txBody>
-      </p:sp>
-      <p:sp>
-        <p:nvSpPr>
-          <p:cNvPr id="3" name="TextBox 2"/>
-          <p:cNvSpPr txBox="1"/>
-          <p:nvPr/>
-        </p:nvSpPr>
-        <p:spPr>
-          <a:xfrm>
-            <a:off x="457200" y="1280160"/>
-            <a:ext cx="8229600" cy="4846320"/>
-          </a:xfrm>
-          <a:prstGeom prst="rect">
-            <a:avLst/>
-          </a:prstGeom>
-          <a:noFill/>
-        </p:spPr>
-        <p:txBody>
-          <a:bodyPr wrap="square">
-            <a:spAutoFit/>
-          </a:bodyPr>
-          <a:lstStyle/>
-          <a:p>
-            <a:pPr>
-              <a:spcAft>
-                <a:spcPts val="800"/>
-              </a:spcAft>
-              <a:defRPr sz="1900"/>
-            </a:pPr>
-            <a:r>
-              <a:t>Live Yelp ingestion with caching.</a:t>
-            </a:r>
-          </a:p>
-          <a:p>
-            <a:pPr>
-              <a:spcAft>
-                <a:spcPts val="800"/>
-              </a:spcAft>
-              <a:defRPr sz="1900"/>
-            </a:pPr>
-            <a:r>
-              <a:t>Public deployment of LocalFind.</a:t>
-            </a:r>
-          </a:p>
-          <a:p>
-            <a:pPr>
-              <a:spcAft>
-                <a:spcPts val="800"/>
-              </a:spcAft>
-              <a:defRPr sz="1900"/>
-            </a:pPr>
-            <a:r>
-              <a:t>Partnerships with neighborhood associations.</a:t>
-            </a:r>
-          </a:p>
-          <a:p>
-            <a:pPr>
-              <a:spcAft>
-                <a:spcPts val="800"/>
-              </a:spcAft>
-              <a:defRPr sz="1900"/>
-            </a:pPr>
-            <a:r>
-              <a:t>Feeds for maps and civic newsletters.</a:t>
-            </a:r>
-          </a:p>
-        </p:txBody>
-      </p:sp>
-    </p:spTree>
-  </p:cSld>
-  <p:clrMapOvr>
-    <a:masterClrMapping/>
-  </p:clrMapOvr>
-</p:sld>
-</file>
-
-<file path=ppt/slides/slide12.xml><?xml version="1.0" encoding="utf-8"?>
-<p:sld xmlns:a="http://schemas.openxmlformats.org/drawingml/2006/main" xmlns:p="http://schemas.openxmlformats.org/presentationml/2006/main" xmlns:r="http://schemas.openxmlformats.org/officeDocument/2006/relationships">
-  <p:cSld>
-    <p:spTree>
-      <p:nvGrpSpPr>
-        <p:cNvPr id="1" name=""/>
-        <p:cNvGrpSpPr/>
-        <p:nvPr/>
-      </p:nvGrpSpPr>
-      <p:grpSpPr/>
-      <p:sp>
-        <p:nvSpPr>
-          <p:cNvPr id="2" name="TextBox 1"/>
-          <p:cNvSpPr txBox="1"/>
-          <p:nvPr/>
-        </p:nvSpPr>
-        <p:spPr>
-          <a:xfrm>
-            <a:off x="457200" y="320040"/>
-            <a:ext cx="8229600" cy="914400"/>
-          </a:xfrm>
-          <a:prstGeom prst="rect">
-            <a:avLst/>
-          </a:prstGeom>
-          <a:noFill/>
-        </p:spPr>
-        <p:txBody>
-          <a:bodyPr wrap="none">
-            <a:spAutoFit/>
-          </a:bodyPr>
-          <a:lstStyle/>
-          <a:p>
-            <a:pPr>
-              <a:defRPr sz="3200" b="1">
-                <a:solidFill>
-                  <a:srgbClr val="4B2E83"/>
-                </a:solidFill>
-              </a:defRPr>
-            </a:pPr>
-            <a:r>
-              <a:t>Thank you</a:t>
-            </a:r>
-          </a:p>
-        </p:txBody>
-      </p:sp>
-      <p:sp>
-        <p:nvSpPr>
-          <p:cNvPr id="3" name="TextBox 2"/>
-          <p:cNvSpPr txBox="1"/>
-          <p:nvPr/>
-        </p:nvSpPr>
-        <p:spPr>
-          <a:xfrm>
-            <a:off x="457200" y="1280160"/>
-            <a:ext cx="8229600" cy="4846320"/>
-          </a:xfrm>
-          <a:prstGeom prst="rect">
-            <a:avLst/>
-          </a:prstGeom>
-          <a:noFill/>
-        </p:spPr>
-        <p:txBody>
-          <a:bodyPr wrap="square">
-            <a:spAutoFit/>
-          </a:bodyPr>
-          <a:lstStyle/>
-          <a:p>
-            <a:pPr>
-              <a:spcAft>
-                <a:spcPts val="800"/>
-              </a:spcAft>
-              <a:defRPr sz="1900"/>
-            </a:pPr>
-            <a:r>
-              <a:t>LocalFind — portable neighborhood business information.</a:t>
-            </a:r>
-          </a:p>
-          <a:p>
-            <a:pPr>
-              <a:spcAft>
-                <a:spcPts val="800"/>
-              </a:spcAft>
-              <a:defRPr sz="1900"/>
-            </a:pPr>
-          </a:p>
-          <a:p>
-            <a:pPr>
-              <a:spcAft>
-                <a:spcPts val="800"/>
-              </a:spcAft>
-              <a:defRPr sz="1900"/>
-            </a:pPr>
-            <a:r>
-              <a:t>github.com/Sneha-8/IMT-542/tree/main/final</a:t>
-            </a:r>
-          </a:p>
-          <a:p>
-            <a:pPr>
-              <a:spcAft>
-                <a:spcPts val="800"/>
-              </a:spcAft>
-              <a:defRPr sz="1900"/>
-            </a:pPr>
-            <a:r>
-              <a:t>Questions?</a:t>
+              <a:defRPr sz="1700"/>
+            </a:pPr>
+            <a:r>
+              <a:t>Sneha Reddy | IMT 542 | github.com/Sneha-8/IMT-542</a:t>
             </a:r>
           </a:p>
         </p:txBody>
@@ -3567,8 +3201,8 @@
         </p:nvSpPr>
         <p:spPr>
           <a:xfrm>
-            <a:off x="457200" y="320040"/>
-            <a:ext cx="8229600" cy="914400"/>
+            <a:off x="411480" y="274320"/>
+            <a:ext cx="8321040" cy="868680"/>
           </a:xfrm>
           <a:prstGeom prst="rect">
             <a:avLst/>
@@ -3582,14 +3216,14 @@
           <a:lstStyle/>
           <a:p>
             <a:pPr>
-              <a:defRPr sz="3200" b="1">
+              <a:defRPr sz="2800" b="1">
                 <a:solidFill>
                   <a:srgbClr val="4B2E83"/>
                 </a:solidFill>
               </a:defRPr>
             </a:pPr>
             <a:r>
-              <a:t>Meet Alex</a:t>
+              <a:t>Information story — who and why</a:t>
             </a:r>
           </a:p>
         </p:txBody>
@@ -3602,8 +3236,8 @@
         </p:nvSpPr>
         <p:spPr>
           <a:xfrm>
-            <a:off x="457200" y="1280160"/>
-            <a:ext cx="8229600" cy="4846320"/>
+            <a:off x="411480" y="1143000"/>
+            <a:ext cx="8321040" cy="5029200"/>
           </a:xfrm>
           <a:prstGeom prst="rect">
             <a:avLst/>
@@ -3618,31 +3252,105 @@
           <a:p>
             <a:pPr>
               <a:spcAft>
-                <a:spcPts val="800"/>
+                <a:spcPts val="600"/>
               </a:spcAft>
-              <a:defRPr sz="1900"/>
-            </a:pPr>
-            <a:r>
-              <a:t>Alex lives in Capitol Hill and wants coffee from a local shop with vegan options and Wi-Fi. They open Yelp, scroll past ads, check Instagram, and often give up.</a:t>
+              <a:defRPr sz="1700"/>
+            </a:pPr>
+            <a:r>
+              <a:t>Story: Community members find small businesses around them (cafes, salons, shops).</a:t>
             </a:r>
           </a:p>
           <a:p>
             <a:pPr>
               <a:spcAft>
-                <a:spcPts val="800"/>
+                <a:spcPts val="600"/>
               </a:spcAft>
-              <a:defRPr sz="1900"/>
+              <a:defRPr sz="1700"/>
             </a:pPr>
           </a:p>
           <a:p>
             <a:pPr>
               <a:spcAft>
-                <a:spcPts val="800"/>
+                <a:spcPts val="600"/>
               </a:spcAft>
-              <a:defRPr sz="1900"/>
-            </a:pPr>
-            <a:r>
-              <a:t>The information exists — it is scattered and locked in apps that were not built for this decision.</a:t>
+              <a:defRPr sz="1700"/>
+            </a:pPr>
+            <a:r>
+              <a:t>Who benefits:</a:t>
+            </a:r>
+          </a:p>
+          <a:p>
+            <a:pPr>
+              <a:spcAft>
+                <a:spcPts val="600"/>
+              </a:spcAft>
+              <a:defRPr sz="1700"/>
+            </a:pPr>
+            <a:r>
+              <a:t>  Residents — discover shops they did not know existed nearby</a:t>
+            </a:r>
+          </a:p>
+          <a:p>
+            <a:pPr>
+              <a:spcAft>
+                <a:spcPts val="600"/>
+              </a:spcAft>
+              <a:defRPr sz="1700"/>
+            </a:pPr>
+            <a:r>
+              <a:t>  Owners — more discoverability in one combined feed</a:t>
+            </a:r>
+          </a:p>
+          <a:p>
+            <a:pPr>
+              <a:spcAft>
+                <a:spcPts val="600"/>
+              </a:spcAft>
+              <a:defRPr sz="1700"/>
+            </a:pPr>
+          </a:p>
+          <a:p>
+            <a:pPr>
+              <a:spcAft>
+                <a:spcPts val="600"/>
+              </a:spcAft>
+              <a:defRPr sz="1700"/>
+            </a:pPr>
+            <a:r>
+              <a:t>Why it matters:</a:t>
+            </a:r>
+          </a:p>
+          <a:p>
+            <a:pPr>
+              <a:spcAft>
+                <a:spcPts val="600"/>
+              </a:spcAft>
+              <a:defRPr sz="1700"/>
+            </a:pPr>
+            <a:r>
+              <a:t>  Local shops are hard to see next to big chains</a:t>
+            </a:r>
+          </a:p>
+          <a:p>
+            <a:pPr>
+              <a:spcAft>
+                <a:spcPts val="600"/>
+              </a:spcAft>
+              <a:defRPr sz="1700"/>
+            </a:pPr>
+            <a:r>
+              <a:t>  Supporting nearby business keeps money in the community</a:t>
+            </a:r>
+          </a:p>
+          <a:p>
+            <a:pPr>
+              <a:spcAft>
+                <a:spcPts val="600"/>
+              </a:spcAft>
+              <a:defRPr sz="1700"/>
+            </a:pPr>
+            <a:r>
+              <a:t>  One search beats checking Yelp, Google, and social separately</a:t>
             </a:r>
           </a:p>
         </p:txBody>
@@ -3673,8 +3381,8 @@
         </p:nvSpPr>
         <p:spPr>
           <a:xfrm>
-            <a:off x="457200" y="320040"/>
-            <a:ext cx="8229600" cy="914400"/>
+            <a:off x="411480" y="274320"/>
+            <a:ext cx="8321040" cy="868680"/>
           </a:xfrm>
           <a:prstGeom prst="rect">
             <a:avLst/>
@@ -3688,14 +3396,14 @@
           <a:lstStyle/>
           <a:p>
             <a:pPr>
-              <a:defRPr sz="3200" b="1">
+              <a:defRPr sz="2800" b="1">
                 <a:solidFill>
                   <a:srgbClr val="4B2E83"/>
                 </a:solidFill>
               </a:defRPr>
             </a:pPr>
             <a:r>
-              <a:t>Why local discovery matters</a:t>
+              <a:t>Current problems</a:t>
             </a:r>
           </a:p>
         </p:txBody>
@@ -3708,8 +3416,8 @@
         </p:nvSpPr>
         <p:spPr>
           <a:xfrm>
-            <a:off x="457200" y="1280160"/>
-            <a:ext cx="8229600" cy="4846320"/>
+            <a:off x="411480" y="1143000"/>
+            <a:ext cx="8321040" cy="5029200"/>
           </a:xfrm>
           <a:prstGeom prst="rect">
             <a:avLst/>
@@ -3724,34 +3432,64 @@
           <a:p>
             <a:pPr>
               <a:spcAft>
-                <a:spcPts val="800"/>
+                <a:spcPts val="600"/>
               </a:spcAft>
-              <a:defRPr sz="1900"/>
-            </a:pPr>
-            <a:r>
-              <a:t>Local spending strengthens neighborhood economies.</a:t>
+              <a:defRPr sz="1700"/>
+            </a:pPr>
+            <a:r>
+              <a:t>Most people do not know how many small businesses exist near them.</a:t>
             </a:r>
           </a:p>
           <a:p>
             <a:pPr>
               <a:spcAft>
-                <a:spcPts val="800"/>
+                <a:spcPts val="600"/>
               </a:spcAft>
-              <a:defRPr sz="1900"/>
-            </a:pPr>
-            <a:r>
-              <a:t>Small shops lack chain-level SEO and ad budgets.</a:t>
+              <a:defRPr sz="1700"/>
+            </a:pPr>
+            <a:r>
+              <a:t>There is no single way to answer what local shops are nearby.</a:t>
             </a:r>
           </a:p>
           <a:p>
             <a:pPr>
               <a:spcAft>
-                <a:spcPts val="800"/>
+                <a:spcPts val="600"/>
               </a:spcAft>
-              <a:defRPr sz="1900"/>
-            </a:pPr>
-            <a:r>
-              <a:t>Civic tools and newsletters need machine-readable listings, not HTML tables.</a:t>
+              <a:defRPr sz="1700"/>
+            </a:pPr>
+            <a:r>
+              <a:t>Information is split across Yelp, Google, Instagram, chamber sites, owner pages.</a:t>
+            </a:r>
+          </a:p>
+          <a:p>
+            <a:pPr>
+              <a:spcAft>
+                <a:spcPts val="600"/>
+              </a:spcAft>
+              <a:defRPr sz="1700"/>
+            </a:pPr>
+            <a:r>
+              <a:t>Each source uses different fields, ads, and rules — every search starts over.</a:t>
+            </a:r>
+          </a:p>
+          <a:p>
+            <a:pPr>
+              <a:spcAft>
+                <a:spcPts val="600"/>
+              </a:spcAft>
+              <a:defRPr sz="1700"/>
+            </a:pPr>
+          </a:p>
+          <a:p>
+            <a:pPr>
+              <a:spcAft>
+                <a:spcPts val="600"/>
+              </a:spcAft>
+              <a:defRPr sz="1700"/>
+            </a:pPr>
+            <a:r>
+              <a:t>The data exists. It is not combined in a form people can use.</a:t>
             </a:r>
           </a:p>
         </p:txBody>
@@ -3782,8 +3520,8 @@
         </p:nvSpPr>
         <p:spPr>
           <a:xfrm>
-            <a:off x="457200" y="320040"/>
-            <a:ext cx="8229600" cy="914400"/>
+            <a:off x="411480" y="274320"/>
+            <a:ext cx="8321040" cy="868680"/>
           </a:xfrm>
           <a:prstGeom prst="rect">
             <a:avLst/>
@@ -3797,14 +3535,14 @@
           <a:lstStyle/>
           <a:p>
             <a:pPr>
-              <a:defRPr sz="3200" b="1">
+              <a:defRPr sz="2800" b="1">
                 <a:solidFill>
                   <a:srgbClr val="4B2E83"/>
                 </a:solidFill>
               </a:defRPr>
             </a:pPr>
             <a:r>
-              <a:t>Where information lives today</a:t>
+              <a:t>FAIR assessment — Yelp + OpenStreetMap</a:t>
             </a:r>
           </a:p>
         </p:txBody>
@@ -3817,8 +3555,8 @@
         </p:nvSpPr>
         <p:spPr>
           <a:xfrm>
-            <a:off x="457200" y="1280160"/>
-            <a:ext cx="8229600" cy="4846320"/>
+            <a:off x="411480" y="1143000"/>
+            <a:ext cx="8321040" cy="5029200"/>
           </a:xfrm>
           <a:prstGeom prst="rect">
             <a:avLst/>
@@ -3833,53 +3571,75 @@
           <a:p>
             <a:pPr>
               <a:spcAft>
-                <a:spcPts val="800"/>
+                <a:spcPts val="600"/>
               </a:spcAft>
-              <a:defRPr sz="1900"/>
-            </a:pPr>
-            <a:r>
-              <a:t>Yelp and Google (proprietary, ad-driven)</a:t>
+              <a:defRPr sz="1700"/>
+            </a:pPr>
+            <a:r>
+              <a:t>                Yelp Fusion          OpenStreetMap</a:t>
             </a:r>
           </a:p>
           <a:p>
             <a:pPr>
               <a:spcAft>
-                <a:spcPts val="800"/>
+                <a:spcPts val="600"/>
               </a:spcAft>
-              <a:defRPr sz="1900"/>
-            </a:pPr>
-            <a:r>
-              <a:t>Chamber HTML directories (no stable IDs)</a:t>
+              <a:defRPr sz="1700"/>
+            </a:pPr>
+            <a:r>
+              <a:t>Findable         Partial              Partial</a:t>
             </a:r>
           </a:p>
           <a:p>
             <a:pPr>
               <a:spcAft>
-                <a:spcPts val="800"/>
+                <a:spcPts val="600"/>
               </a:spcAft>
-              <a:defRPr sz="1900"/>
-            </a:pPr>
-            <a:r>
-              <a:t>Social posts and owner sites (unstructured)</a:t>
+              <a:defRPr sz="1700"/>
+            </a:pPr>
+            <a:r>
+              <a:t>Accessible       Partial (API key)    Partial (throttle)</a:t>
             </a:r>
           </a:p>
           <a:p>
             <a:pPr>
               <a:spcAft>
-                <a:spcPts val="800"/>
+                <a:spcPts val="600"/>
               </a:spcAft>
-              <a:defRPr sz="1900"/>
-            </a:pPr>
+              <a:defRPr sz="1700"/>
+            </a:pPr>
+            <a:r>
+              <a:t>Interoperable    Low                  Partial (tags)</a:t>
+            </a:r>
           </a:p>
           <a:p>
             <a:pPr>
               <a:spcAft>
-                <a:spcPts val="800"/>
+                <a:spcPts val="600"/>
               </a:spcAft>
-              <a:defRPr sz="1900"/>
-            </a:pPr>
-            <a:r>
-              <a:t>Problems: cannot combine open-now + tags + neighborhood in one query; no provenance; owner contact mixed with public data.</a:t>
+              <a:defRPr sz="1700"/>
+            </a:pPr>
+            <a:r>
+              <a:t>Reusable         Low (display-only)   High (ODbL)</a:t>
+            </a:r>
+          </a:p>
+          <a:p>
+            <a:pPr>
+              <a:spcAft>
+                <a:spcPts val="600"/>
+              </a:spcAft>
+              <a:defRPr sz="1700"/>
+            </a:pPr>
+          </a:p>
+          <a:p>
+            <a:pPr>
+              <a:spcAft>
+                <a:spcPts val="600"/>
+              </a:spcAft>
+              <a:defRPr sz="1700"/>
+            </a:pPr>
+            <a:r>
+              <a:t>Yelp: ratings, photos, hours. OSM: open map data. Neither alone fits our story.</a:t>
             </a:r>
           </a:p>
         </p:txBody>
@@ -3910,8 +3670,8 @@
         </p:nvSpPr>
         <p:spPr>
           <a:xfrm>
-            <a:off x="457200" y="320040"/>
-            <a:ext cx="8229600" cy="914400"/>
+            <a:off x="411480" y="274320"/>
+            <a:ext cx="8321040" cy="868680"/>
           </a:xfrm>
           <a:prstGeom prst="rect">
             <a:avLst/>
@@ -3925,14 +3685,14 @@
           <a:lstStyle/>
           <a:p>
             <a:pPr>
-              <a:defRPr sz="3200" b="1">
+              <a:defRPr sz="2800" b="1">
                 <a:solidFill>
                   <a:srgbClr val="4B2E83"/>
                 </a:solidFill>
               </a:defRPr>
             </a:pPr>
             <a:r>
-              <a:t>The journey we designed</a:t>
+              <a:t>Our solution — SBP v1.0 + LocalFind</a:t>
             </a:r>
           </a:p>
         </p:txBody>
@@ -3945,8 +3705,8 @@
         </p:nvSpPr>
         <p:spPr>
           <a:xfrm>
-            <a:off x="457200" y="1280160"/>
-            <a:ext cx="8229600" cy="4846320"/>
+            <a:off x="411480" y="1143000"/>
+            <a:ext cx="8321040" cy="5029200"/>
           </a:xfrm>
           <a:prstGeom prst="rect">
             <a:avLst/>
@@ -3961,31 +3721,94 @@
           <a:p>
             <a:pPr>
               <a:spcAft>
-                <a:spcPts val="800"/>
+                <a:spcPts val="600"/>
               </a:spcAft>
-              <a:defRPr sz="1900"/>
-            </a:pPr>
-            <a:r>
-              <a:t>Sources -&gt; normalize to one schema -&gt; document database -&gt; REST API -&gt; LocalFind UI</a:t>
+              <a:defRPr sz="1700"/>
+            </a:pPr>
+            <a:r>
+              <a:t>Pipeline: Yelp + OSM -&gt; normalizer -&gt; cache -&gt; API -&gt; LocalFind UI</a:t>
             </a:r>
           </a:p>
           <a:p>
             <a:pPr>
               <a:spcAft>
-                <a:spcPts val="800"/>
+                <a:spcPts val="600"/>
               </a:spcAft>
-              <a:defRPr sz="1900"/>
+              <a:defRPr sz="1700"/>
             </a:pPr>
           </a:p>
           <a:p>
             <a:pPr>
               <a:spcAft>
-                <a:spcPts val="800"/>
+                <a:spcPts val="600"/>
               </a:spcAft>
-              <a:defRPr sz="1900"/>
-            </a:pPr>
-            <a:r>
-              <a:t>Same facts can power a website, map layer, newsletter, or assistant without re-scraping.</a:t>
+              <a:defRPr sz="1700"/>
+            </a:pPr>
+            <a:r>
+              <a:t>Design for FAIR gaps:</a:t>
+            </a:r>
+          </a:p>
+          <a:p>
+            <a:pPr>
+              <a:spcAft>
+                <a:spcPts val="600"/>
+              </a:spcAft>
+              <a:defRPr sz="1700"/>
+            </a:pPr>
+            <a:r>
+              <a:t>  Findable — stable id, schema_version</a:t>
+            </a:r>
+          </a:p>
+          <a:p>
+            <a:pPr>
+              <a:spcAft>
+                <a:spcPts val="600"/>
+              </a:spcAft>
+              <a:defRPr sz="1700"/>
+            </a:pPr>
+            <a:r>
+              <a:t>  Accessible — REST + web (ZIP, category, near me)</a:t>
+            </a:r>
+          </a:p>
+          <a:p>
+            <a:pPr>
+              <a:spcAft>
+                <a:spcPts val="600"/>
+              </a:spcAft>
+              <a:defRPr sz="1700"/>
+            </a:pPr>
+            <a:r>
+              <a:t>  Interoperable — one JSON shape for both sources</a:t>
+            </a:r>
+          </a:p>
+          <a:p>
+            <a:pPr>
+              <a:spcAft>
+                <a:spcPts val="600"/>
+              </a:spcAft>
+              <a:defRPr sz="1700"/>
+            </a:pPr>
+            <a:r>
+              <a:t>  Reusable — provenance + quality_flags on every response</a:t>
+            </a:r>
+          </a:p>
+          <a:p>
+            <a:pPr>
+              <a:spcAft>
+                <a:spcPts val="600"/>
+              </a:spcAft>
+              <a:defRPr sz="1700"/>
+            </a:pPr>
+          </a:p>
+          <a:p>
+            <a:pPr>
+              <a:spcAft>
+                <a:spcPts val="600"/>
+              </a:spcAft>
+              <a:defRPr sz="1700"/>
+            </a:pPr>
+            <a:r>
+              <a:t>Example: merged record with name, zip_code, hours, rating, yelp_url, osm_url</a:t>
             </a:r>
           </a:p>
         </p:txBody>
@@ -4016,8 +3839,8 @@
         </p:nvSpPr>
         <p:spPr>
           <a:xfrm>
-            <a:off x="457200" y="320040"/>
-            <a:ext cx="8229600" cy="914400"/>
+            <a:off x="411480" y="274320"/>
+            <a:ext cx="8321040" cy="868680"/>
           </a:xfrm>
           <a:prstGeom prst="rect">
             <a:avLst/>
@@ -4031,14 +3854,14 @@
           <a:lstStyle/>
           <a:p>
             <a:pPr>
-              <a:defRPr sz="3200" b="1">
+              <a:defRPr sz="2800" b="1">
                 <a:solidFill>
                   <a:srgbClr val="4B2E83"/>
                 </a:solidFill>
               </a:defRPr>
             </a:pPr>
             <a:r>
-              <a:t>The LocalFind experience</a:t>
+              <a:t>Quality, performance, security</a:t>
             </a:r>
           </a:p>
         </p:txBody>
@@ -4051,8 +3874,8 @@
         </p:nvSpPr>
         <p:spPr>
           <a:xfrm>
-            <a:off x="457200" y="1280160"/>
-            <a:ext cx="8229600" cy="4846320"/>
+            <a:off x="411480" y="1143000"/>
+            <a:ext cx="8321040" cy="5029200"/>
           </a:xfrm>
           <a:prstGeom prst="rect">
             <a:avLst/>
@@ -4067,53 +3890,45 @@
           <a:p>
             <a:pPr>
               <a:spcAft>
-                <a:spcPts val="800"/>
+                <a:spcPts val="600"/>
               </a:spcAft>
-              <a:defRPr sz="1900"/>
-            </a:pPr>
-            <a:r>
-              <a:t>Search by keyword, neighborhood, and tags.</a:t>
+              <a:defRPr sz="1700"/>
+            </a:pPr>
+            <a:r>
+              <a:t>Quality: JSON Schema; completeness_score; 12 pytest tests</a:t>
             </a:r>
           </a:p>
           <a:p>
             <a:pPr>
               <a:spcAft>
-                <a:spcPts val="800"/>
+                <a:spcPts val="600"/>
               </a:spcAft>
-              <a:defRPr sz="1900"/>
-            </a:pPr>
-            <a:r>
-              <a:t>See ratings, hours, open-now status, and popular items.</a:t>
+              <a:defRPr sz="1700"/>
+            </a:pPr>
+            <a:r>
+              <a:t>Performance: cached search ~20-100 ms; live refresh ~15-40 s</a:t>
             </a:r>
           </a:p>
           <a:p>
             <a:pPr>
               <a:spcAft>
-                <a:spcPts val="800"/>
+                <a:spcPts val="600"/>
               </a:spcAft>
-              <a:defRPr sz="1900"/>
-            </a:pPr>
-            <a:r>
-              <a:t>Business detail with website, directions, and provenance footer.</a:t>
+              <a:defRPr sz="1700"/>
+            </a:pPr>
+            <a:r>
+              <a:t>Security: public API hides phone/email; Bearer unlocks contact; keys in .env only</a:t>
             </a:r>
           </a:p>
           <a:p>
             <a:pPr>
               <a:spcAft>
-                <a:spcPts val="800"/>
+                <a:spcPts val="600"/>
               </a:spcAft>
-              <a:defRPr sz="1900"/>
-            </a:pPr>
-          </a:p>
-          <a:p>
-            <a:pPr>
-              <a:spcAft>
-                <a:spcPts val="800"/>
-              </a:spcAft>
-              <a:defRPr sz="1900"/>
-            </a:pPr>
-            <a:r>
-              <a:t>See live prototype: final/web/platform.html (open in browser during demo)</a:t>
+              <a:defRPr sz="1700"/>
+            </a:pPr>
+            <a:r>
+              <a:t>Tradeoffs: cache speed vs freshness; more metadata vs larger payloads</a:t>
             </a:r>
           </a:p>
         </p:txBody>
@@ -4144,8 +3959,8 @@
         </p:nvSpPr>
         <p:spPr>
           <a:xfrm>
-            <a:off x="457200" y="320040"/>
-            <a:ext cx="8229600" cy="914400"/>
+            <a:off x="411480" y="274320"/>
+            <a:ext cx="8321040" cy="868680"/>
           </a:xfrm>
           <a:prstGeom prst="rect">
             <a:avLst/>
@@ -4159,14 +3974,14 @@
           <a:lstStyle/>
           <a:p>
             <a:pPr>
-              <a:defRPr sz="3200" b="1">
+              <a:defRPr sz="2800" b="1">
                 <a:solidFill>
                   <a:srgbClr val="4B2E83"/>
                 </a:solidFill>
               </a:defRPr>
             </a:pPr>
             <a:r>
-              <a:t>Portable structure — what changed</a:t>
+              <a:t>Demo — LocalFind</a:t>
             </a:r>
           </a:p>
         </p:txBody>
@@ -4179,8 +3994,8 @@
         </p:nvSpPr>
         <p:spPr>
           <a:xfrm>
-            <a:off x="457200" y="1280160"/>
-            <a:ext cx="8229600" cy="4846320"/>
+            <a:off x="411480" y="1143000"/>
+            <a:ext cx="8321040" cy="5029200"/>
           </a:xfrm>
           <a:prstGeom prst="rect">
             <a:avLst/>
@@ -4195,34 +4010,34 @@
           <a:p>
             <a:pPr>
               <a:spcAft>
-                <a:spcPts val="800"/>
+                <a:spcPts val="600"/>
               </a:spcAft>
-              <a:defRPr sz="1900"/>
-            </a:pPr>
-            <a:r>
-              <a:t>Envelope: schema version, provenance, completeness on every response.</a:t>
+              <a:defRPr sz="1700"/>
+            </a:pPr>
+            <a:r>
+              <a:t>Search by category, ZIP, or near me.</a:t>
             </a:r>
           </a:p>
           <a:p>
             <a:pPr>
               <a:spcAft>
-                <a:spcPts val="800"/>
+                <a:spcPts val="600"/>
               </a:spcAft>
-              <a:defRPr sz="1900"/>
-            </a:pPr>
-            <a:r>
-              <a:t>Records: split addresses, E.164 phones, tags, hours, quality flags.</a:t>
+              <a:defRPr sz="1700"/>
+            </a:pPr>
+            <a:r>
+              <a:t>Open a listing for hours, ratings, directions.</a:t>
             </a:r>
           </a:p>
           <a:p>
             <a:pPr>
               <a:spcAft>
-                <a:spcPts val="800"/>
+                <a:spcPts val="600"/>
               </a:spcAft>
-              <a:defRPr sz="1900"/>
-            </a:pPr>
-            <a:r>
-              <a:t>Access: HTTPS search API instead of a static JSON file only developers can read.</a:t>
+              <a:defRPr sz="1700"/>
+            </a:pPr>
+            <a:r>
+              <a:t>http://127.0.0.1:8777/web/platform.html</a:t>
             </a:r>
           </a:p>
         </p:txBody>
@@ -4253,8 +4068,8 @@
         </p:nvSpPr>
         <p:spPr>
           <a:xfrm>
-            <a:off x="457200" y="320040"/>
-            <a:ext cx="8229600" cy="914400"/>
+            <a:off x="411480" y="274320"/>
+            <a:ext cx="8321040" cy="868680"/>
           </a:xfrm>
           <a:prstGeom prst="rect">
             <a:avLst/>
@@ -4268,14 +4083,14 @@
           <a:lstStyle/>
           <a:p>
             <a:pPr>
-              <a:defRPr sz="3200" b="1">
+              <a:defRPr sz="2800" b="1">
                 <a:solidFill>
                   <a:srgbClr val="4B2E83"/>
                 </a:solidFill>
               </a:defRPr>
             </a:pPr>
             <a:r>
-              <a:t>Trust and privacy</a:t>
+              <a:t>Thank you</a:t>
             </a:r>
           </a:p>
         </p:txBody>
@@ -4288,8 +4103,8 @@
         </p:nvSpPr>
         <p:spPr>
           <a:xfrm>
-            <a:off x="457200" y="1280160"/>
-            <a:ext cx="8229600" cy="4846320"/>
+            <a:off x="411480" y="1143000"/>
+            <a:ext cx="8321040" cy="5029200"/>
           </a:xfrm>
           <a:prstGeom prst="rect">
             <a:avLst/>
@@ -4304,162 +4119,34 @@
           <a:p>
             <a:pPr>
               <a:spcAft>
-                <a:spcPts val="800"/>
+                <a:spcPts val="600"/>
               </a:spcAft>
-              <a:defRPr sz="1900"/>
-            </a:pPr>
-            <a:r>
-              <a:t>Provenance and license on every payload.</a:t>
+              <a:defRPr sz="1700"/>
+            </a:pPr>
+            <a:r>
+              <a:t>LocalFind — discover local small businesses; more visibility for owners.</a:t>
             </a:r>
           </a:p>
           <a:p>
             <a:pPr>
               <a:spcAft>
-                <a:spcPts val="800"/>
+                <a:spcPts val="600"/>
               </a:spcAft>
-              <a:defRPr sz="1900"/>
-            </a:pPr>
-            <a:r>
-              <a:t>Quality flags so consumers know what is missing.</a:t>
+              <a:defRPr sz="1700"/>
+            </a:pPr>
+            <a:r>
+              <a:t>github.com/Sneha-8/IMT-542/tree/main/final</a:t>
             </a:r>
           </a:p>
           <a:p>
             <a:pPr>
               <a:spcAft>
-                <a:spcPts val="800"/>
+                <a:spcPts val="600"/>
               </a:spcAft>
-              <a:defRPr sz="1900"/>
-            </a:pPr>
-            <a:r>
-              <a:t>Public listings hide owner email/phone unless Bearer token authorizes access.</a:t>
-            </a:r>
-          </a:p>
-        </p:txBody>
-      </p:sp>
-    </p:spTree>
-  </p:cSld>
-  <p:clrMapOvr>
-    <a:masterClrMapping/>
-  </p:clrMapOvr>
-</p:sld>
-</file>
-
-<file path=ppt/slides/slide9.xml><?xml version="1.0" encoding="utf-8"?>
-<p:sld xmlns:a="http://schemas.openxmlformats.org/drawingml/2006/main" xmlns:p="http://schemas.openxmlformats.org/presentationml/2006/main" xmlns:r="http://schemas.openxmlformats.org/officeDocument/2006/relationships">
-  <p:cSld>
-    <p:spTree>
-      <p:nvGrpSpPr>
-        <p:cNvPr id="1" name=""/>
-        <p:cNvGrpSpPr/>
-        <p:nvPr/>
-      </p:nvGrpSpPr>
-      <p:grpSpPr/>
-      <p:sp>
-        <p:nvSpPr>
-          <p:cNvPr id="2" name="TextBox 1"/>
-          <p:cNvSpPr txBox="1"/>
-          <p:nvPr/>
-        </p:nvSpPr>
-        <p:spPr>
-          <a:xfrm>
-            <a:off x="457200" y="320040"/>
-            <a:ext cx="8229600" cy="914400"/>
-          </a:xfrm>
-          <a:prstGeom prst="rect">
-            <a:avLst/>
-          </a:prstGeom>
-          <a:noFill/>
-        </p:spPr>
-        <p:txBody>
-          <a:bodyPr wrap="none">
-            <a:spAutoFit/>
-          </a:bodyPr>
-          <a:lstStyle/>
-          <a:p>
-            <a:pPr>
-              <a:defRPr sz="3200" b="1">
-                <a:solidFill>
-                  <a:srgbClr val="4B2E83"/>
-                </a:solidFill>
-              </a:defRPr>
-            </a:pPr>
-            <a:r>
-              <a:t>How we got here</a:t>
-            </a:r>
-          </a:p>
-        </p:txBody>
-      </p:sp>
-      <p:sp>
-        <p:nvSpPr>
-          <p:cNvPr id="3" name="TextBox 2"/>
-          <p:cNvSpPr txBox="1"/>
-          <p:nvPr/>
-        </p:nvSpPr>
-        <p:spPr>
-          <a:xfrm>
-            <a:off x="457200" y="1280160"/>
-            <a:ext cx="8229600" cy="4846320"/>
-          </a:xfrm>
-          <a:prstGeom prst="rect">
-            <a:avLst/>
-          </a:prstGeom>
-          <a:noFill/>
-        </p:spPr>
-        <p:txBody>
-          <a:bodyPr wrap="square">
-            <a:spAutoFit/>
-          </a:bodyPr>
-          <a:lstStyle/>
-          <a:p>
-            <a:pPr>
-              <a:spcAft>
-                <a:spcPts val="800"/>
-              </a:spcAft>
-              <a:defRPr sz="1900"/>
-            </a:pPr>
-            <a:r>
-              <a:t>Started with Flask + JSON file.</a:t>
-            </a:r>
-          </a:p>
-          <a:p>
-            <a:pPr>
-              <a:spcAft>
-                <a:spcPts val="800"/>
-              </a:spcAft>
-              <a:defRPr sz="1900"/>
-            </a:pPr>
-            <a:r>
-              <a:t>Added MongoDB and aggregation endpoints.</a:t>
-            </a:r>
-          </a:p>
-          <a:p>
-            <a:pPr>
-              <a:spcAft>
-                <a:spcPts val="800"/>
-              </a:spcAft>
-              <a:defRPr sz="1900"/>
-            </a:pPr>
-            <a:r>
-              <a:t>Shipped schema v1.0, normalizer, tests, and this UI prototype.</a:t>
-            </a:r>
-          </a:p>
-          <a:p>
-            <a:pPr>
-              <a:spcAft>
-                <a:spcPts val="800"/>
-              </a:spcAft>
-              <a:defRPr sz="1900"/>
-            </a:pPr>
-          </a:p>
-          <a:p>
-            <a:pPr>
-              <a:spcAft>
-                <a:spcPts val="800"/>
-              </a:spcAft>
-              <a:defRPr sz="1900"/>
-            </a:pPr>
-            <a:r>
-              <a:t>Production path: Yelp Fusion feeds the same normalizer.</a:t>
+              <a:defRPr sz="1700"/>
+            </a:pPr>
+            <a:r>
+              <a:t>Questions?</a:t>
             </a:r>
           </a:p>
         </p:txBody>
